--- a/Topic_A/Exam_Practice/AT-A-L09_Writing_Workshop_Travel_and_Transport_for_Everyday_Journeys.pptx
+++ b/Topic_A/Exam_Practice/AT-A-L09_Writing_Workshop_Travel_and_Transport_for_Everyday_Journeys.pptx
@@ -784,7 +784,11 @@
           <a:lstStyle/>
           <a:p>
             <a:r>
-              <a:rPr lang="en-US" dirty="0"/>
+              <a:rPr lang="ar-SA" dirty="0">
+                <a:latin typeface="Amiri" pitchFamily="2" charset="-78"/>
+                <a:ea typeface="Amiri" pitchFamily="2" charset="-78"/>
+                <a:cs typeface="Amiri" pitchFamily="2" charset="-78"/>
+              </a:rPr>
               <a:t>Q3 (3 min to choose and read). Title (أ) suits Core and Develop; title (ب) suits Stretch.</a:t>
             </a:r>
             <a:endParaRPr lang="en-US" dirty="0"/>
@@ -1403,7 +1407,11 @@
           <a:lstStyle/>
           <a:p>
             <a:r>
-              <a:rPr lang="en-US" dirty="0"/>
+              <a:rPr lang="ar-SA" dirty="0">
+                <a:latin typeface="Amiri" pitchFamily="2" charset="-78"/>
+                <a:ea typeface="Amiri" pitchFamily="2" charset="-78"/>
+                <a:cs typeface="Amiri" pitchFamily="2" charset="-78"/>
+              </a:rPr>
               <a:t>WELCOME (1 min) — while students join.
 • Greet each student by name as they arrive: السَّلَامُ عَلَيْكُمْ. Take the register (Pastoral Tracker: attendance 0/1).
 • 2-MINUTE CHECK-IN (SEND training): a private chat to any student who seemed unsettled last lesson — “Are you okay today? 👍 / 👎”.
@@ -1936,7 +1944,11 @@
           <a:lstStyle/>
           <a:p>
             <a:r>
-              <a:rPr lang="en-US" dirty="0"/>
+              <a:rPr lang="ar-SA" dirty="0">
+                <a:latin typeface="Amiri" pitchFamily="2" charset="-78"/>
+                <a:ea typeface="Amiri" pitchFamily="2" charset="-78"/>
+                <a:cs typeface="Amiri" pitchFamily="2" charset="-78"/>
+              </a:rPr>
               <a:t>Question words: كَيْفَ (how) · مَتَى (when) · كَمْ (how long) · مَعَ مَنْ (with whom) · مَا رَأْيُكِ (your opinion) — bullet 4 is PAST then FUTURE.</a:t>
             </a:r>
             <a:endParaRPr lang="en-US" dirty="0"/>
@@ -2508,6 +2520,7 @@
                   <a:srgbClr val="D4AF37"/>
                 </a:solidFill>
                 <a:latin typeface="Amiri" pitchFamily="2" charset="-78"/>
+                <a:ea typeface="Amiri" pitchFamily="2" charset="-78"/>
                 <a:cs typeface="Amiri" pitchFamily="2" charset="-78"/>
               </a:rPr>
               <a:t>م</a:t>
@@ -2714,6 +2727,7 @@
                   <a:srgbClr val="D4AF37"/>
                 </a:solidFill>
                 <a:latin typeface="Amiri" pitchFamily="2" charset="-78"/>
+                <a:ea typeface="Amiri" pitchFamily="2" charset="-78"/>
                 <a:cs typeface="Amiri" pitchFamily="2" charset="-78"/>
               </a:rPr>
               <a:t>وَرْشَةُ الكِتَابَةِ — المُوَاصَلَاتُ اليَوْمِيَّةُ</a:t>
@@ -3171,6 +3185,7 @@
                   <a:srgbClr val="D4AF37"/>
                 </a:solidFill>
                 <a:latin typeface="Amiri" pitchFamily="2" charset="-78"/>
+                <a:ea typeface="Amiri" pitchFamily="2" charset="-78"/>
                 <a:cs typeface="Amiri" pitchFamily="2" charset="-78"/>
               </a:rPr>
               <a:t>م</a:t>
@@ -3491,6 +3506,7 @@
                   <a:srgbClr val="8A6D1E"/>
                 </a:solidFill>
                 <a:latin typeface="Amiri" pitchFamily="2" charset="-78"/>
+                <a:ea typeface="Amiri" pitchFamily="2" charset="-78"/>
                 <a:cs typeface="Amiri" pitchFamily="2" charset="-78"/>
               </a:rPr>
               <a:t>نَمُوذَجُ الإِجَابَةِ</a:t>
@@ -3604,6 +3620,7 @@
                   <a:srgbClr val="1F2A37"/>
                 </a:solidFill>
                 <a:latin typeface="Amiri" pitchFamily="2" charset="-78"/>
+                <a:ea typeface="Amiri" pitchFamily="2" charset="-78"/>
                 <a:cs typeface="Amiri" pitchFamily="2" charset="-78"/>
               </a:rPr>
               <a:t>مَرْحَبًا يَا جَمِيلَةُ،</a:t>
@@ -3623,6 +3640,7 @@
                   <a:srgbClr val="1F2A37"/>
                 </a:solidFill>
                 <a:latin typeface="Amiri" pitchFamily="2" charset="-78"/>
+                <a:ea typeface="Amiri" pitchFamily="2" charset="-78"/>
                 <a:cs typeface="Amiri" pitchFamily="2" charset="-78"/>
               </a:rPr>
               <a:t>كَيْفَ حَالُكِ؟ أَذْهَبُ إِلَى المَدْرَسَةِ الجَدِيدَةِ بِالحَافِلَةِ كُلَّ يَوْمٍ. أَخْرُجُ مِنَ البَيْتِ فِي السَّاعَةِ السَّابِعَةِ، وَتَسْتَغْرِقُ الرِّحْلَةُ نِصْفَ سَاعَةٍ تَقْرِيبًا. أَرْكَبُ الحَافِلَةَ مَعَ صَدِيقَتِي هِنْدٍ، وَنَتَحَدَّثُ طُولَ الطَّرِيقِ. الحَافِلَةُ رَخِيصَةٌ، لٰكِنَّهَا مُزْدَحِمَةٌ جِدًّا فِي الصَّبَاحِ. أَمْسِ تَأَخَّرَتِ الحَافِلَةُ، فَوَصَلْتُ إِلَى المَدْرَسَةِ مُتَأَخِّرَةً عَشْرَ دَقَائِقَ. فِي السَّنَةِ القَادِمَةِ سَأَذْهَبُ بِالدَّرَّاجَةِ، لِأَنَّهَا أَسْرَعُ.</a:t>
@@ -3642,6 +3660,7 @@
                   <a:srgbClr val="1F2A37"/>
                 </a:solidFill>
                 <a:latin typeface="Amiri" pitchFamily="2" charset="-78"/>
+                <a:ea typeface="Amiri" pitchFamily="2" charset="-78"/>
                 <a:cs typeface="Amiri" pitchFamily="2" charset="-78"/>
               </a:rPr>
               <a:t>مَعَ السَّلَامَةِ،</a:t>
@@ -3661,6 +3680,7 @@
                   <a:srgbClr val="1F2A37"/>
                 </a:solidFill>
                 <a:latin typeface="Amiri" pitchFamily="2" charset="-78"/>
+                <a:ea typeface="Amiri" pitchFamily="2" charset="-78"/>
                 <a:cs typeface="Amiri" pitchFamily="2" charset="-78"/>
               </a:rPr>
               <a:t>سَارَةُ</a:t>
@@ -3824,11 +3844,12 @@
               <a:buNone/>
             </a:pPr>
             <a:r>
-              <a:rPr lang="en-US" sz="950" b="1" dirty="0">
+              <a:rPr lang="ar-SA" sz="950" b="1" dirty="0">
                 <a:solidFill>
                   <a:srgbClr val="FFFFFF"/>
                 </a:solidFill>
                 <a:latin typeface="Calibri" pitchFamily="34" charset="0"/>
+                <a:ea typeface="Amiri" pitchFamily="2" charset="-78"/>
                 <a:cs typeface="Amiri" pitchFamily="2" charset="-78"/>
               </a:rPr>
               <a:t>بِالحَافِلَةِ</a:t>
@@ -3889,11 +3910,12 @@
               <a:buNone/>
             </a:pPr>
             <a:r>
-              <a:rPr lang="en-US" sz="950" b="1" dirty="0">
+              <a:rPr lang="ar-SA" sz="950" b="1" dirty="0">
                 <a:solidFill>
                   <a:srgbClr val="FFFFFF"/>
                 </a:solidFill>
                 <a:latin typeface="Calibri" pitchFamily="34" charset="0"/>
+                <a:ea typeface="Amiri" pitchFamily="2" charset="-78"/>
                 <a:cs typeface="Amiri" pitchFamily="2" charset="-78"/>
               </a:rPr>
               <a:t>تَسْتَغْرِقُ الرِّحْلَةُ</a:t>
@@ -3954,11 +3976,12 @@
               <a:buNone/>
             </a:pPr>
             <a:r>
-              <a:rPr lang="en-US" sz="950" b="1" dirty="0">
+              <a:rPr lang="ar-SA" sz="950" b="1" dirty="0">
                 <a:solidFill>
                   <a:srgbClr val="FFFFFF"/>
                 </a:solidFill>
                 <a:latin typeface="Calibri" pitchFamily="34" charset="0"/>
+                <a:ea typeface="Amiri" pitchFamily="2" charset="-78"/>
                 <a:cs typeface="Amiri" pitchFamily="2" charset="-78"/>
               </a:rPr>
               <a:t>لٰكِنَّهَا مُزْدَحِمَةٌ</a:t>
@@ -4019,11 +4042,12 @@
               <a:buNone/>
             </a:pPr>
             <a:r>
-              <a:rPr lang="en-US" sz="950" b="1" dirty="0">
+              <a:rPr lang="ar-SA" sz="950" b="1" dirty="0">
                 <a:solidFill>
                   <a:srgbClr val="FFFFFF"/>
                 </a:solidFill>
                 <a:latin typeface="Calibri" pitchFamily="34" charset="0"/>
+                <a:ea typeface="Amiri" pitchFamily="2" charset="-78"/>
                 <a:cs typeface="Amiri" pitchFamily="2" charset="-78"/>
               </a:rPr>
               <a:t>سَأَذْهَبُ بِالدَّرَّاجَةِ</a:t>
@@ -4157,6 +4181,7 @@
                   <a:srgbClr val="D4AF37"/>
                 </a:solidFill>
                 <a:latin typeface="Amiri" pitchFamily="2" charset="-78"/>
+                <a:ea typeface="Amiri" pitchFamily="2" charset="-78"/>
                 <a:cs typeface="Amiri" pitchFamily="2" charset="-78"/>
               </a:rPr>
               <a:t>م</a:t>
@@ -4477,6 +4502,7 @@
                   <a:srgbClr val="8A6D1E"/>
                 </a:solidFill>
                 <a:latin typeface="Amiri" pitchFamily="2" charset="-78"/>
+                <a:ea typeface="Amiri" pitchFamily="2" charset="-78"/>
                 <a:cs typeface="Amiri" pitchFamily="2" charset="-78"/>
               </a:rPr>
               <a:t>نَمُوذَجُ الإِجَابَةِ</a:t>
@@ -4590,6 +4616,7 @@
                   <a:srgbClr val="1F2A37"/>
                 </a:solidFill>
                 <a:latin typeface="Amiri" pitchFamily="2" charset="-78"/>
+                <a:ea typeface="Amiri" pitchFamily="2" charset="-78"/>
                 <a:cs typeface="Amiri" pitchFamily="2" charset="-78"/>
               </a:rPr>
               <a:t>عَزِيزَتِي جَمِيلَةُ،</a:t>
@@ -4609,6 +4636,7 @@
                   <a:srgbClr val="1F2A37"/>
                 </a:solidFill>
                 <a:latin typeface="Amiri" pitchFamily="2" charset="-78"/>
+                <a:ea typeface="Amiri" pitchFamily="2" charset="-78"/>
                 <a:cs typeface="Amiri" pitchFamily="2" charset="-78"/>
               </a:rPr>
               <a:t>تَحِيَّةً طَيِّبَةً، وَبَعْدُ، فَقَدْ سَأَلْتِنِي كَيْفَ أَذْهَبُ إِلَى مَدْرَسَتِي الجَدِيدَةِ. أَرْكَبُ الحَافِلَةَ رَقْمَ ١٢ مِنَ المَحَطَّةِ الَّتِي أَمَامَ بَيْتِنَا فِي السَّاعَةِ السَّابِعَةِ، وَتَسْتَغْرِقُ الرِّحْلَةُ نَحْوَ نِصْفِ سَاعَةٍ. أُفَضِّلُ الحَافِلَةَ عَلَى السَّيَّارَةِ، لِأَنَّهَا أَرْخَصُ وَأَفْضَلُ لِلْبِيئَةِ، غَيْرَ أَنَّهَا تَكُونُ مُزْدَحِمَةً فِي الصَّبَاحِ. أَمْسِ حَدَثَ شَيْءٌ مُضْحِكٌ: نِمْتُ فِي الحَافِلَةِ، فَفَاتَتْنِي مَحَطَّتِي، وَاضْطُرِرْتُ إِلَى المَشْيِ عَشْرَ دَقَائِقَ تَحْتَ المَطَرِ، فَوَصَلْتُ مُبْتَلَّةً وَمُتَأَخِّرَةً! فِي السَّنَةِ القَادِمَةِ سَأَذْهَبُ بِالدَّرَّاجَةِ، لِأَنَّهَا أَسْرَعُ وَأَكْثَرُ مُتْعَةً. وَأَنْتِ، كَيْفَ تَذْهَبِينَ إِلَى مَدْرَسَتِكِ؟ أَنْتَظِرُ رَدَّكِ بِشَوْقٍ.</a:t>
@@ -4628,6 +4656,7 @@
                   <a:srgbClr val="1F2A37"/>
                 </a:solidFill>
                 <a:latin typeface="Amiri" pitchFamily="2" charset="-78"/>
+                <a:ea typeface="Amiri" pitchFamily="2" charset="-78"/>
                 <a:cs typeface="Amiri" pitchFamily="2" charset="-78"/>
               </a:rPr>
               <a:t>مَعَ مَحَبَّتِي،</a:t>
@@ -4647,6 +4676,7 @@
                   <a:srgbClr val="1F2A37"/>
                 </a:solidFill>
                 <a:latin typeface="Amiri" pitchFamily="2" charset="-78"/>
+                <a:ea typeface="Amiri" pitchFamily="2" charset="-78"/>
                 <a:cs typeface="Amiri" pitchFamily="2" charset="-78"/>
               </a:rPr>
               <a:t>سَارَةُ</a:t>
@@ -4810,11 +4840,12 @@
               <a:buNone/>
             </a:pPr>
             <a:r>
-              <a:rPr lang="en-US" sz="950" b="1" dirty="0">
+              <a:rPr lang="ar-SA" sz="950" b="1" dirty="0">
                 <a:solidFill>
                   <a:srgbClr val="FFFFFF"/>
                 </a:solidFill>
                 <a:latin typeface="Calibri" pitchFamily="34" charset="0"/>
+                <a:ea typeface="Amiri" pitchFamily="2" charset="-78"/>
                 <a:cs typeface="Amiri" pitchFamily="2" charset="-78"/>
               </a:rPr>
               <a:t>الَّتِي أَمَامَ بَيْتِنَا</a:t>
@@ -4875,11 +4906,12 @@
               <a:buNone/>
             </a:pPr>
             <a:r>
-              <a:rPr lang="en-US" sz="950" b="1" dirty="0">
+              <a:rPr lang="ar-SA" sz="950" b="1" dirty="0">
                 <a:solidFill>
                   <a:srgbClr val="FFFFFF"/>
                 </a:solidFill>
                 <a:latin typeface="Calibri" pitchFamily="34" charset="0"/>
+                <a:ea typeface="Amiri" pitchFamily="2" charset="-78"/>
                 <a:cs typeface="Amiri" pitchFamily="2" charset="-78"/>
               </a:rPr>
               <a:t>أُفَضِّلُ الحَافِلَةَ عَلَى السَّيَّارَةِ</a:t>
@@ -4940,11 +4972,12 @@
               <a:buNone/>
             </a:pPr>
             <a:r>
-              <a:rPr lang="en-US" sz="950" b="1" dirty="0">
+              <a:rPr lang="ar-SA" sz="950" b="1" dirty="0">
                 <a:solidFill>
                   <a:srgbClr val="FFFFFF"/>
                 </a:solidFill>
                 <a:latin typeface="Calibri" pitchFamily="34" charset="0"/>
+                <a:ea typeface="Amiri" pitchFamily="2" charset="-78"/>
                 <a:cs typeface="Amiri" pitchFamily="2" charset="-78"/>
               </a:rPr>
               <a:t>فَفَاتَتْنِي مَحَطَّتِي</a:t>
@@ -5005,11 +5038,12 @@
               <a:buNone/>
             </a:pPr>
             <a:r>
-              <a:rPr lang="en-US" sz="950" b="1" dirty="0">
+              <a:rPr lang="ar-SA" sz="950" b="1" dirty="0">
                 <a:solidFill>
                   <a:srgbClr val="FFFFFF"/>
                 </a:solidFill>
                 <a:latin typeface="Calibri" pitchFamily="34" charset="0"/>
+                <a:ea typeface="Amiri" pitchFamily="2" charset="-78"/>
                 <a:cs typeface="Amiri" pitchFamily="2" charset="-78"/>
               </a:rPr>
               <a:t>أَسْرَعُ وَأَكْثَرُ مُتْعَةً</a:t>
@@ -5143,6 +5177,7 @@
                   <a:srgbClr val="D4AF37"/>
                 </a:solidFill>
                 <a:latin typeface="Amiri" pitchFamily="2" charset="-78"/>
+                <a:ea typeface="Amiri" pitchFamily="2" charset="-78"/>
                 <a:cs typeface="Amiri" pitchFamily="2" charset="-78"/>
               </a:rPr>
               <a:t>م</a:t>
@@ -5463,6 +5498,7 @@
                   <a:srgbClr val="8A6D1E"/>
                 </a:solidFill>
                 <a:latin typeface="Amiri" pitchFamily="2" charset="-78"/>
+                <a:ea typeface="Amiri" pitchFamily="2" charset="-78"/>
                 <a:cs typeface="Amiri" pitchFamily="2" charset="-78"/>
               </a:rPr>
               <a:t>اخْتَرْ عُنْوَانًا وَاحِدًا</a:t>
@@ -5743,6 +5779,7 @@
                   <a:srgbClr val="1B3B6F"/>
                 </a:solidFill>
                 <a:latin typeface="Amiri" pitchFamily="2" charset="-78"/>
+                <a:ea typeface="Amiri" pitchFamily="2" charset="-78"/>
                 <a:cs typeface="Amiri" pitchFamily="2" charset="-78"/>
               </a:rPr>
               <a:t>المُوَاصَلَاتُ فِي حَيَاتِي</a:t>
@@ -5781,6 +5818,7 @@
                   <a:srgbClr val="1B3B6F"/>
                 </a:solidFill>
                 <a:latin typeface="Amiri" pitchFamily="2" charset="-78"/>
+                <a:ea typeface="Amiri" pitchFamily="2" charset="-78"/>
                 <a:cs typeface="Amiri" pitchFamily="2" charset="-78"/>
               </a:rPr>
               <a:t>(أ)</a:t>
@@ -5887,6 +5925,7 @@
                   <a:srgbClr val="1B3B6F"/>
                 </a:solidFill>
                 <a:latin typeface="Amiri" pitchFamily="2" charset="-78"/>
+                <a:ea typeface="Amiri" pitchFamily="2" charset="-78"/>
                 <a:cs typeface="Amiri" pitchFamily="2" charset="-78"/>
               </a:rPr>
               <a:t>كَيْفَ تَذْهَبُ إِلَى المَدْرَسَةِ وَالأَمَاكِنِ الأُخْرَى؟ · قَارِنْ بَيْنَ وَسِيلَتَيْنِ · رِحْلَةٌ لَا تَنْسَاهَا · رَأْيُكَ وَخُطَطُكَ لِلْمُسْتَقْبَلِ</a:t>
@@ -6018,6 +6057,7 @@
                   <a:srgbClr val="1B3B6F"/>
                 </a:solidFill>
                 <a:latin typeface="Amiri" pitchFamily="2" charset="-78"/>
+                <a:ea typeface="Amiri" pitchFamily="2" charset="-78"/>
                 <a:cs typeface="Amiri" pitchFamily="2" charset="-78"/>
               </a:rPr>
               <a:t>السَّيَّارَةُ أَمِ المُوَاصَلَاتُ العَامَّةُ؟</a:t>
@@ -6056,6 +6096,7 @@
                   <a:srgbClr val="1B3B6F"/>
                 </a:solidFill>
                 <a:latin typeface="Amiri" pitchFamily="2" charset="-78"/>
+                <a:ea typeface="Amiri" pitchFamily="2" charset="-78"/>
                 <a:cs typeface="Amiri" pitchFamily="2" charset="-78"/>
               </a:rPr>
               <a:t>(ب)</a:t>
@@ -6162,6 +6203,7 @@
                   <a:srgbClr val="1B3B6F"/>
                 </a:solidFill>
                 <a:latin typeface="Amiri" pitchFamily="2" charset="-78"/>
+                <a:ea typeface="Amiri" pitchFamily="2" charset="-78"/>
                 <a:cs typeface="Amiri" pitchFamily="2" charset="-78"/>
               </a:rPr>
               <a:t>المُشْكِلَاتُ فِي مَدِينَتِكَ · كَيْفَ تَغَيَّرَتِ المُوَاصَلَاتُ؟ · تَجْرِبَةٌ أَوْ مُبَادَرَةٌ تَعْرِفُهَا · رَأْيُكَ وَاقْتِرَاحَاتُكَ</a:t>
@@ -6361,6 +6403,7 @@
                   <a:srgbClr val="D4AF37"/>
                 </a:solidFill>
                 <a:latin typeface="Amiri" pitchFamily="2" charset="-78"/>
+                <a:ea typeface="Amiri" pitchFamily="2" charset="-78"/>
                 <a:cs typeface="Amiri" pitchFamily="2" charset="-78"/>
               </a:rPr>
               <a:t>م</a:t>
@@ -6681,6 +6724,7 @@
                   <a:srgbClr val="8A6D1E"/>
                 </a:solidFill>
                 <a:latin typeface="Amiri" pitchFamily="2" charset="-78"/>
+                <a:ea typeface="Amiri" pitchFamily="2" charset="-78"/>
                 <a:cs typeface="Amiri" pitchFamily="2" charset="-78"/>
               </a:rPr>
               <a:t>خُطَّةُ الكِتَابَةِ</a:t>
@@ -7305,6 +7349,7 @@
                   <a:srgbClr val="1B3B6F"/>
                 </a:solidFill>
                 <a:latin typeface="Amiri" pitchFamily="2" charset="-78"/>
+                <a:ea typeface="Amiri" pitchFamily="2" charset="-78"/>
                 <a:cs typeface="Amiri" pitchFamily="2" charset="-78"/>
               </a:rPr>
               <a:t>أَذْهَبُ إِلَى المَدْرَسَةِ بِالقِطَارِ.</a:t>
@@ -7404,6 +7449,7 @@
                   <a:srgbClr val="1B3B6F"/>
                 </a:solidFill>
                 <a:latin typeface="Amiri" pitchFamily="2" charset="-78"/>
+                <a:ea typeface="Amiri" pitchFamily="2" charset="-78"/>
                 <a:cs typeface="Amiri" pitchFamily="2" charset="-78"/>
               </a:rPr>
               <a:t>رَكِبْنَا القِطَارَ، وَوَصَلْنَا ظُهْرًا.</a:t>
@@ -7503,6 +7549,7 @@
                   <a:srgbClr val="1B3B6F"/>
                 </a:solidFill>
                 <a:latin typeface="Amiri" pitchFamily="2" charset="-78"/>
+                <a:ea typeface="Amiri" pitchFamily="2" charset="-78"/>
                 <a:cs typeface="Amiri" pitchFamily="2" charset="-78"/>
               </a:rPr>
               <a:t>سَأَذْهَبُ بِالدَّرَّاجَةِ فِي السَّنَةِ القَادِمَةِ.</a:t>
@@ -7664,6 +7711,7 @@
                   <a:srgbClr val="1F2A37"/>
                 </a:solidFill>
                 <a:latin typeface="Amiri" pitchFamily="2" charset="-78"/>
+                <a:ea typeface="Amiri" pitchFamily="2" charset="-78"/>
                 <a:cs typeface="Amiri" pitchFamily="2" charset="-78"/>
               </a:rPr>
               <a:t>أ</a:t>
@@ -7690,6 +7738,7 @@
                   <a:srgbClr val="1F2A37"/>
                 </a:solidFill>
                 <a:latin typeface="Amiri" pitchFamily="2" charset="-78"/>
+                <a:ea typeface="Amiri" pitchFamily="2" charset="-78"/>
                 <a:cs typeface="Amiri" pitchFamily="2" charset="-78"/>
               </a:rPr>
               <a:t>ب</a:t>
@@ -7836,6 +7885,7 @@
                   <a:srgbClr val="D4AF37"/>
                 </a:solidFill>
                 <a:latin typeface="Amiri" pitchFamily="2" charset="-78"/>
+                <a:ea typeface="Amiri" pitchFamily="2" charset="-78"/>
                 <a:cs typeface="Amiri" pitchFamily="2" charset="-78"/>
               </a:rPr>
               <a:t>م</a:t>
@@ -8093,6 +8143,7 @@
                   <a:srgbClr val="8A6D1E"/>
                 </a:solidFill>
                 <a:latin typeface="Amiri" pitchFamily="2" charset="-78"/>
+                <a:ea typeface="Amiri" pitchFamily="2" charset="-78"/>
                 <a:cs typeface="Amiri" pitchFamily="2" charset="-78"/>
               </a:rPr>
               <a:t>أ</a:t>
@@ -8157,6 +8208,7 @@
                   <a:srgbClr val="1B3B6F"/>
                 </a:solidFill>
                 <a:latin typeface="Amiri" pitchFamily="2" charset="-78"/>
+                <a:ea typeface="Amiri" pitchFamily="2" charset="-78"/>
                 <a:cs typeface="Amiri" pitchFamily="2" charset="-78"/>
               </a:rPr>
               <a:t>أ</a:t>
@@ -8208,6 +8260,7 @@
                   <a:srgbClr val="8A6D1E"/>
                 </a:solidFill>
                 <a:latin typeface="Amiri" pitchFamily="2" charset="-78"/>
+                <a:ea typeface="Amiri" pitchFamily="2" charset="-78"/>
                 <a:cs typeface="Amiri" pitchFamily="2" charset="-78"/>
               </a:rPr>
               <a:t>نَمُوذَجُ الإِجَابَةِ</a:t>
@@ -8321,6 +8374,7 @@
                   <a:srgbClr val="1F2A37"/>
                 </a:solidFill>
                 <a:latin typeface="Amiri" pitchFamily="2" charset="-78"/>
+                <a:ea typeface="Amiri" pitchFamily="2" charset="-78"/>
                 <a:cs typeface="Amiri" pitchFamily="2" charset="-78"/>
               </a:rPr>
               <a:t>أَسْكُنُ فِي مَدِينَةٍ كَبِيرَةٍ، وَفِيهَا مُوَاصَلَاتٌ كَثِيرَةٌ: الحَافِلَاتُ وَالقِطَارَاتُ وَسَيَّارَاتُ الأُجْرَةِ. أَذْهَبُ إِلَى المَدْرَسَةِ بِالحَافِلَةِ، وَتَسْتَغْرِقُ الرِّحْلَةُ عِشْرِينَ دَقِيقَةً تَقْرِيبًا. أَبِي يَذْهَبُ إِلَى العَمَلِ بِالقِطَارِ، وَأُمِّي تَذْهَبُ بِالسَّيَّارَةِ، لِأَنَّ عَمَلَهَا بَعِيدٌ عَنِ المَحَطَّةِ.</a:t>
@@ -8340,6 +8394,7 @@
                   <a:srgbClr val="1F2A37"/>
                 </a:solidFill>
                 <a:latin typeface="Amiri" pitchFamily="2" charset="-78"/>
+                <a:ea typeface="Amiri" pitchFamily="2" charset="-78"/>
                 <a:cs typeface="Amiri" pitchFamily="2" charset="-78"/>
               </a:rPr>
               <a:t>أُحِبُّ القِطَارَ، لِأَنَّهُ سَرِيعٌ وَمُرِيحٌ. الحَافِلَةُ أَرْخَصُ مِنَ القِطَارِ، لٰكِنَّهَا أَبْطَأُ، وَهِيَ مُزْدَحِمَةٌ فِي الصَّبَاحِ. السَّيَّارَةُ مُرِيحَةٌ، لٰكِنَّهَا غَالِيَةٌ، وَهِيَ تُلَوِّثُ الهَوَاءَ.</a:t>
@@ -8359,6 +8414,7 @@
                   <a:srgbClr val="1F2A37"/>
                 </a:solidFill>
                 <a:latin typeface="Amiri" pitchFamily="2" charset="-78"/>
+                <a:ea typeface="Amiri" pitchFamily="2" charset="-78"/>
                 <a:cs typeface="Amiri" pitchFamily="2" charset="-78"/>
               </a:rPr>
               <a:t>فِي الشَّهْرِ المَاضِي ذَهَبْتُ مَعَ أُسْرَتِي إِلَى بَيْتِ جَدِّي بِالقِطَارِ. رَكِبْنَا القِطَارَ فِي السَّاعَةِ التَّاسِعَةِ، وَوَصَلْنَا فِي السَّاعَةِ الثَّانِيَةَ عَشْرَةَ. أَكَلْنَا السَّنْدَوِيشَاتِ، وَلَعِبْنَا الوَرَقَ فِي القِطَارِ. كَانَتِ الرِّحْلَةُ مُمْتِعَةً جِدًّا، وَرَأَيْنَا مِنَ النَّافِذَةِ جِبَالًا وَمَزَارِعَ جَمِيلَةً.</a:t>
@@ -8378,6 +8434,7 @@
                   <a:srgbClr val="1F2A37"/>
                 </a:solidFill>
                 <a:latin typeface="Amiri" pitchFamily="2" charset="-78"/>
+                <a:ea typeface="Amiri" pitchFamily="2" charset="-78"/>
                 <a:cs typeface="Amiri" pitchFamily="2" charset="-78"/>
               </a:rPr>
               <a:t>فِي رَأْيِي، يَجِبُ أَنْ نَسْتَعْمِلَ المُوَاصَلَاتِ العَامَّةَ أَكْثَرَ، لِأَنَّهَا أَفْضَلُ لِلْبِيئَةِ. فِي المُسْتَقْبَلِ سَأَذْهَبُ إِلَى المَدْرَسَةِ بِالدَّرَّاجَةِ مَعَ أَصْدِقَائِي.</a:t>
@@ -8541,11 +8598,12 @@
               <a:buNone/>
             </a:pPr>
             <a:r>
-              <a:rPr lang="en-US" sz="950" b="1" dirty="0">
+              <a:rPr lang="ar-SA" sz="950" b="1" dirty="0">
                 <a:solidFill>
                   <a:srgbClr val="FFFFFF"/>
                 </a:solidFill>
                 <a:latin typeface="Calibri" pitchFamily="34" charset="0"/>
+                <a:ea typeface="Amiri" pitchFamily="2" charset="-78"/>
                 <a:cs typeface="Amiri" pitchFamily="2" charset="-78"/>
               </a:rPr>
               <a:t>تَسْتَغْرِقُ الرِّحْلَةُ</a:t>
@@ -8606,11 +8664,12 @@
               <a:buNone/>
             </a:pPr>
             <a:r>
-              <a:rPr lang="en-US" sz="950" b="1" dirty="0">
+              <a:rPr lang="ar-SA" sz="950" b="1" dirty="0">
                 <a:solidFill>
                   <a:srgbClr val="FFFFFF"/>
                 </a:solidFill>
                 <a:latin typeface="Calibri" pitchFamily="34" charset="0"/>
+                <a:ea typeface="Amiri" pitchFamily="2" charset="-78"/>
                 <a:cs typeface="Amiri" pitchFamily="2" charset="-78"/>
               </a:rPr>
               <a:t>أَرْخَصُ مِنَ القِطَارِ</a:t>
@@ -8671,11 +8730,12 @@
               <a:buNone/>
             </a:pPr>
             <a:r>
-              <a:rPr lang="en-US" sz="950" b="1" dirty="0">
+              <a:rPr lang="ar-SA" sz="950" b="1" dirty="0">
                 <a:solidFill>
                   <a:srgbClr val="FFFFFF"/>
                 </a:solidFill>
                 <a:latin typeface="Calibri" pitchFamily="34" charset="0"/>
+                <a:ea typeface="Amiri" pitchFamily="2" charset="-78"/>
                 <a:cs typeface="Amiri" pitchFamily="2" charset="-78"/>
               </a:rPr>
               <a:t>رَكِبْنَا القِطَارَ</a:t>
@@ -8736,11 +8796,12 @@
               <a:buNone/>
             </a:pPr>
             <a:r>
-              <a:rPr lang="en-US" sz="950" b="1" dirty="0">
+              <a:rPr lang="ar-SA" sz="950" b="1" dirty="0">
                 <a:solidFill>
                   <a:srgbClr val="FFFFFF"/>
                 </a:solidFill>
                 <a:latin typeface="Calibri" pitchFamily="34" charset="0"/>
+                <a:ea typeface="Amiri" pitchFamily="2" charset="-78"/>
                 <a:cs typeface="Amiri" pitchFamily="2" charset="-78"/>
               </a:rPr>
               <a:t>يَجِبُ أَنْ نَسْتَعْمِلَ</a:t>
@@ -8874,6 +8935,7 @@
                   <a:srgbClr val="D4AF37"/>
                 </a:solidFill>
                 <a:latin typeface="Amiri" pitchFamily="2" charset="-78"/>
+                <a:ea typeface="Amiri" pitchFamily="2" charset="-78"/>
                 <a:cs typeface="Amiri" pitchFamily="2" charset="-78"/>
               </a:rPr>
               <a:t>م</a:t>
@@ -9131,6 +9193,7 @@
                   <a:srgbClr val="8A6D1E"/>
                 </a:solidFill>
                 <a:latin typeface="Amiri" pitchFamily="2" charset="-78"/>
+                <a:ea typeface="Amiri" pitchFamily="2" charset="-78"/>
                 <a:cs typeface="Amiri" pitchFamily="2" charset="-78"/>
               </a:rPr>
               <a:t>أ</a:t>
@@ -9195,6 +9258,7 @@
                   <a:srgbClr val="1B3B6F"/>
                 </a:solidFill>
                 <a:latin typeface="Amiri" pitchFamily="2" charset="-78"/>
+                <a:ea typeface="Amiri" pitchFamily="2" charset="-78"/>
                 <a:cs typeface="Amiri" pitchFamily="2" charset="-78"/>
               </a:rPr>
               <a:t>أ</a:t>
@@ -9246,6 +9310,7 @@
                   <a:srgbClr val="8A6D1E"/>
                 </a:solidFill>
                 <a:latin typeface="Amiri" pitchFamily="2" charset="-78"/>
+                <a:ea typeface="Amiri" pitchFamily="2" charset="-78"/>
                 <a:cs typeface="Amiri" pitchFamily="2" charset="-78"/>
               </a:rPr>
               <a:t>نَمُوذَجُ الإِجَابَةِ</a:t>
@@ -9359,6 +9424,7 @@
                   <a:srgbClr val="1F2A37"/>
                 </a:solidFill>
                 <a:latin typeface="Amiri" pitchFamily="2" charset="-78"/>
+                <a:ea typeface="Amiri" pitchFamily="2" charset="-78"/>
                 <a:cs typeface="Amiri" pitchFamily="2" charset="-78"/>
               </a:rPr>
               <a:t>أَسْكُنُ فِي ضَاحِيَةٍ هَادِئَةٍ، عَلَى بُعْدِ عَشَرَةِ كِيلُومِتْرَاتٍ مِنْ وَسَطِ المَدِينَةِ، وَلِذٰلِكَ تُشَكِّلُ المُوَاصَلَاتُ جُزْءًا كَبِيرًا مِنْ يَوْمِي. أَخْرُجُ مِنَ البَيْتِ فِي السَّابِعَةِ، وَأَمْشِي خَمْسَ دَقَائِقَ إِلَى المَحَطَّةِ، ثُمَّ أَرْكَبُ القِطَارَ الَّذِي يَصِلُ بِي إِلَى المَدْرَسَةِ فِي رُبْعِ سَاعَةٍ فَقَطْ، وَأَقْرَأُ أَوْ أُرَاجِعُ دُرُوسِي أَثْنَاءَ الرِّحْلَةِ.</a:t>
@@ -9378,6 +9444,7 @@
                   <a:srgbClr val="1F2A37"/>
                 </a:solidFill>
                 <a:latin typeface="Amiri" pitchFamily="2" charset="-78"/>
+                <a:ea typeface="Amiri" pitchFamily="2" charset="-78"/>
                 <a:cs typeface="Amiri" pitchFamily="2" charset="-78"/>
               </a:rPr>
               <a:t>أُفَضِّلُ القِطَارَ عَلَى الحَافِلَةِ، لِأَنَّهُ أَسْرَعُ بِكَثِيرٍ وَلَا يَتَأَثَّرُ بِازْدِحَامِ الشَّوَارِعِ أَوْ بِالحَوَادِثِ، أَمَّا الحَافِلَةُ فَأَرْخَصُ، غَيْرَ أَنَّهَا قَدْ تَتَأَخَّرُ نِصْفَ سَاعَةٍ فِي أَوْقَاتِ الذُّرْوَةِ.</a:t>
@@ -9397,6 +9464,7 @@
                   <a:srgbClr val="1F2A37"/>
                 </a:solidFill>
                 <a:latin typeface="Amiri" pitchFamily="2" charset="-78"/>
+                <a:ea typeface="Amiri" pitchFamily="2" charset="-78"/>
                 <a:cs typeface="Amiri" pitchFamily="2" charset="-78"/>
               </a:rPr>
               <a:t>لٰكِنَّ القِطَارَ لَيْسَ مِثَالِيًّا دَائِمًا؛ فَفِي الشِّتَاءِ المَاضِي تَعَطَّلَ القِطَارُ بِسَبَبِ الثَّلْجِ، فَانْتَظَرْنَا سَاعَةً كَامِلَةً فِي البَرْدِ الشَّدِيدِ، ثُمَّ مَشَيْتُ مَعَ زُمَلَائِي إِلَى المَدْرَسَةِ، وَوَصَلْنَا بَعْدَ أَنْ بَدَأَ الدَّرْسُ الثَّانِي.</a:t>
@@ -9416,6 +9484,7 @@
                   <a:srgbClr val="1F2A37"/>
                 </a:solidFill>
                 <a:latin typeface="Amiri" pitchFamily="2" charset="-78"/>
+                <a:ea typeface="Amiri" pitchFamily="2" charset="-78"/>
                 <a:cs typeface="Amiri" pitchFamily="2" charset="-78"/>
               </a:rPr>
               <a:t>فِي رَأْيِي، يَنْبَغِي أَنْ تَسْتَثْمِرَ المَدِينَةُ فِي طُرُقِ الدَّرَّاجَاتِ، لِأَنَّهَا أَرْخَصُ وَأَنْظَفُ، وَتُشَجِّعُ الشَّبَابَ عَلَى الرِّيَاضَةِ. وَلَوْ كَانَتْ هُنَاكَ طَرِيقٌ آمِنَةٌ مِنْ بَيْتِي إِلَى المَدْرَسَةِ، لَذَهَبْتُ بِالدَّرَّاجَةِ كُلَّ يَوْمٍ، حَتَّى فِي الشِّتَاءِ.</a:t>
@@ -9514,11 +9583,12 @@
               <a:buNone/>
             </a:pPr>
             <a:r>
-              <a:rPr lang="en-US" sz="950" b="1" dirty="0">
+              <a:rPr lang="ar-SA" sz="950" b="1" dirty="0">
                 <a:solidFill>
                   <a:srgbClr val="FFFFFF"/>
                 </a:solidFill>
                 <a:latin typeface="Calibri" pitchFamily="34" charset="0"/>
+                <a:ea typeface="Amiri" pitchFamily="2" charset="-78"/>
                 <a:cs typeface="Amiri" pitchFamily="2" charset="-78"/>
               </a:rPr>
               <a:t>يَصِلُ بِي إِلَى المَدْرَسَةِ</a:t>
@@ -9579,11 +9649,12 @@
               <a:buNone/>
             </a:pPr>
             <a:r>
-              <a:rPr lang="en-US" sz="950" b="1" dirty="0">
+              <a:rPr lang="ar-SA" sz="950" b="1" dirty="0">
                 <a:solidFill>
                   <a:srgbClr val="FFFFFF"/>
                 </a:solidFill>
                 <a:latin typeface="Calibri" pitchFamily="34" charset="0"/>
+                <a:ea typeface="Amiri" pitchFamily="2" charset="-78"/>
                 <a:cs typeface="Amiri" pitchFamily="2" charset="-78"/>
               </a:rPr>
               <a:t>أَمَّا الحَافِلَةُ فَأَرْخَصُ</a:t>
@@ -9644,11 +9715,12 @@
               <a:buNone/>
             </a:pPr>
             <a:r>
-              <a:rPr lang="en-US" sz="950" b="1" dirty="0">
+              <a:rPr lang="ar-SA" sz="950" b="1" dirty="0">
                 <a:solidFill>
                   <a:srgbClr val="FFFFFF"/>
                 </a:solidFill>
                 <a:latin typeface="Calibri" pitchFamily="34" charset="0"/>
+                <a:ea typeface="Amiri" pitchFamily="2" charset="-78"/>
                 <a:cs typeface="Amiri" pitchFamily="2" charset="-78"/>
               </a:rPr>
               <a:t>بَعْدَ أَنْ بَدَأَ</a:t>
@@ -9709,11 +9781,12 @@
               <a:buNone/>
             </a:pPr>
             <a:r>
-              <a:rPr lang="en-US" sz="950" b="1" dirty="0">
+              <a:rPr lang="ar-SA" sz="950" b="1" dirty="0">
                 <a:solidFill>
                   <a:srgbClr val="FFFFFF"/>
                 </a:solidFill>
                 <a:latin typeface="Calibri" pitchFamily="34" charset="0"/>
+                <a:ea typeface="Amiri" pitchFamily="2" charset="-78"/>
                 <a:cs typeface="Amiri" pitchFamily="2" charset="-78"/>
               </a:rPr>
               <a:t>لَوْ كَانَتْ … لَذَهَبْتُ</a:t>
@@ -9847,6 +9920,7 @@
                   <a:srgbClr val="D4AF37"/>
                 </a:solidFill>
                 <a:latin typeface="Amiri" pitchFamily="2" charset="-78"/>
+                <a:ea typeface="Amiri" pitchFamily="2" charset="-78"/>
                 <a:cs typeface="Amiri" pitchFamily="2" charset="-78"/>
               </a:rPr>
               <a:t>م</a:t>
@@ -10104,6 +10178,7 @@
                   <a:srgbClr val="8A6D1E"/>
                 </a:solidFill>
                 <a:latin typeface="Amiri" pitchFamily="2" charset="-78"/>
+                <a:ea typeface="Amiri" pitchFamily="2" charset="-78"/>
                 <a:cs typeface="Amiri" pitchFamily="2" charset="-78"/>
               </a:rPr>
               <a:t>ب</a:t>
@@ -10168,6 +10243,7 @@
                   <a:srgbClr val="1B3B6F"/>
                 </a:solidFill>
                 <a:latin typeface="Amiri" pitchFamily="2" charset="-78"/>
+                <a:ea typeface="Amiri" pitchFamily="2" charset="-78"/>
                 <a:cs typeface="Amiri" pitchFamily="2" charset="-78"/>
               </a:rPr>
               <a:t>ب</a:t>
@@ -10219,6 +10295,7 @@
                   <a:srgbClr val="8A6D1E"/>
                 </a:solidFill>
                 <a:latin typeface="Amiri" pitchFamily="2" charset="-78"/>
+                <a:ea typeface="Amiri" pitchFamily="2" charset="-78"/>
                 <a:cs typeface="Amiri" pitchFamily="2" charset="-78"/>
               </a:rPr>
               <a:t>نَمُوذَجُ الإِجَابَةِ</a:t>
@@ -10332,6 +10409,7 @@
                   <a:srgbClr val="1F2A37"/>
                 </a:solidFill>
                 <a:latin typeface="Amiri" pitchFamily="2" charset="-78"/>
+                <a:ea typeface="Amiri" pitchFamily="2" charset="-78"/>
                 <a:cs typeface="Amiri" pitchFamily="2" charset="-78"/>
               </a:rPr>
               <a:t>يَعْتَمِدُ كَثِيرٌ مِنَ النَّاسِ فِي مَدِينَتِي عَلَى السَّيَّارَاتِ الخَاصَّةِ، حَتَّى لِلرِّحْلَاتِ القَصِيرَةِ، وَهٰذَا يُسَبِّبُ ازْدِحَامًا شَدِيدًا وَتَلَوُّثًا فِي الهَوَاءِ، خُصُوصًا فِي الصَّبَاحِ عِنْدَمَا يَذْهَبُ الجَمِيعُ إِلَى العَمَلِ وَالمَدَارِسِ فِي الوَقْتِ نَفْسِهِ. وَقَدْ تَسْتَغْرِقُ رِحْلَةٌ قَصِيرَةٌ نِصْفَ سَاعَةٍ أَوْ أَكْثَرَ.</a:t>
@@ -10351,6 +10429,7 @@
                   <a:srgbClr val="1F2A37"/>
                 </a:solidFill>
                 <a:latin typeface="Amiri" pitchFamily="2" charset="-78"/>
+                <a:ea typeface="Amiri" pitchFamily="2" charset="-78"/>
                 <a:cs typeface="Amiri" pitchFamily="2" charset="-78"/>
               </a:rPr>
               <a:t>فِي المَاضِي كَانَ النَّاسُ يَمْشُونَ إِلَى السُّوقِ وَالمَسْجِدِ وَالمَدْرَسَةِ، لِأَنَّ كُلَّ شَيْءٍ كَانَ قَرِيبًا، أَمَّا اليَوْمَ فَقَدْ كَبُرَتِ المُدُنُ، وَأَصْبَحَتِ المَسَافَاتُ أَطْوَلَ، فَصَارَتِ السَّيَّارَةُ ضَرُورَةً لِكَثِيرٍ مِنَ الأُسَرِ، خُصُوصًا فِي الأَحْيَاءِ البَعِيدَةِ.</a:t>
@@ -10370,6 +10449,7 @@
                   <a:srgbClr val="1F2A37"/>
                 </a:solidFill>
                 <a:latin typeface="Amiri" pitchFamily="2" charset="-78"/>
+                <a:ea typeface="Amiri" pitchFamily="2" charset="-78"/>
                 <a:cs typeface="Amiri" pitchFamily="2" charset="-78"/>
               </a:rPr>
               <a:t>فِي السَّنَةِ المَاضِيَةِ نَظَّمَتْ مَدْرَسَتِي «أُسْبُوعَ بِلَا سَيَّارَاتٍ»؛ جَاءَ الطُّلَّابُ مَشْيًا أَوْ بِالدَّرَّاجَاتِ أَوْ بِالحَافِلَةِ، فَقَلَّ الازْدِحَامُ أَمَامَ المَدْرَسَةِ بِشَكْلٍ وَاضِحٍ، وَشَعَرَ الجَمِيعُ بِنَشَاطٍ أَكْبَرَ فِي الحِصَّةِ الأُولَى.</a:t>
@@ -10389,6 +10469,7 @@
                   <a:srgbClr val="1F2A37"/>
                 </a:solidFill>
                 <a:latin typeface="Amiri" pitchFamily="2" charset="-78"/>
+                <a:ea typeface="Amiri" pitchFamily="2" charset="-78"/>
                 <a:cs typeface="Amiri" pitchFamily="2" charset="-78"/>
               </a:rPr>
               <a:t>صَحِيحٌ أَنَّ السَّيَّارَةَ مُرِيحَةٌ وَضَرُورِيَّةٌ أَحْيَانًا، غَيْرَ أَنَّ المُوَاصَلَاتِ العَامَّةَ أَفْضَلُ لِلْبِيئَةِ وَأَرْخَصُ لِلْأُسْرَةِ. وَلَوْ جَعَلَتِ البَلَدِيَّةُ الحَافِلَاتِ أَكْثَرَ وَأَسْرَعَ، لَتَرَكَ كَثِيرٌ مِنَ النَّاسِ سَيَّارَاتِهِمْ فِي البَيْتِ، وَلَأَصْبَحَتْ مَدِينَتُنَا أَنْظَفَ وَأَهْدَأَ.</a:t>
@@ -10487,11 +10568,12 @@
               <a:buNone/>
             </a:pPr>
             <a:r>
-              <a:rPr lang="en-US" sz="950" b="1" dirty="0">
+              <a:rPr lang="ar-SA" sz="950" b="1" dirty="0">
                 <a:solidFill>
                   <a:srgbClr val="FFFFFF"/>
                 </a:solidFill>
                 <a:latin typeface="Calibri" pitchFamily="34" charset="0"/>
+                <a:ea typeface="Amiri" pitchFamily="2" charset="-78"/>
                 <a:cs typeface="Amiri" pitchFamily="2" charset="-78"/>
               </a:rPr>
               <a:t>يَعْتَمِدُ كَثِيرٌ مِنَ النَّاسِ</a:t>
@@ -10552,11 +10634,12 @@
               <a:buNone/>
             </a:pPr>
             <a:r>
-              <a:rPr lang="en-US" sz="950" b="1" dirty="0">
+              <a:rPr lang="ar-SA" sz="950" b="1" dirty="0">
                 <a:solidFill>
                   <a:srgbClr val="FFFFFF"/>
                 </a:solidFill>
                 <a:latin typeface="Calibri" pitchFamily="34" charset="0"/>
+                <a:ea typeface="Amiri" pitchFamily="2" charset="-78"/>
                 <a:cs typeface="Amiri" pitchFamily="2" charset="-78"/>
               </a:rPr>
               <a:t>أَمَّا اليَوْمَ فَقَدْ كَبُرَتِ</a:t>
@@ -10617,11 +10700,12 @@
               <a:buNone/>
             </a:pPr>
             <a:r>
-              <a:rPr lang="en-US" sz="950" b="1" dirty="0">
+              <a:rPr lang="ar-SA" sz="950" b="1" dirty="0">
                 <a:solidFill>
                   <a:srgbClr val="FFFFFF"/>
                 </a:solidFill>
                 <a:latin typeface="Calibri" pitchFamily="34" charset="0"/>
+                <a:ea typeface="Amiri" pitchFamily="2" charset="-78"/>
                 <a:cs typeface="Amiri" pitchFamily="2" charset="-78"/>
               </a:rPr>
               <a:t>«أُسْبُوعَ بِلَا سَيَّارَاتٍ»</a:t>
@@ -10682,11 +10766,12 @@
               <a:buNone/>
             </a:pPr>
             <a:r>
-              <a:rPr lang="en-US" sz="950" b="1" dirty="0">
+              <a:rPr lang="ar-SA" sz="950" b="1" dirty="0">
                 <a:solidFill>
                   <a:srgbClr val="FFFFFF"/>
                 </a:solidFill>
                 <a:latin typeface="Calibri" pitchFamily="34" charset="0"/>
+                <a:ea typeface="Amiri" pitchFamily="2" charset="-78"/>
                 <a:cs typeface="Amiri" pitchFamily="2" charset="-78"/>
               </a:rPr>
               <a:t>لَوْ جَعَلَتِ … لَتَرَكَ</a:t>
@@ -10820,6 +10905,7 @@
                   <a:srgbClr val="D4AF37"/>
                 </a:solidFill>
                 <a:latin typeface="Amiri" pitchFamily="2" charset="-78"/>
+                <a:ea typeface="Amiri" pitchFamily="2" charset="-78"/>
                 <a:cs typeface="Amiri" pitchFamily="2" charset="-78"/>
               </a:rPr>
               <a:t>م</a:t>
@@ -11140,6 +11226,7 @@
                   <a:srgbClr val="8A6D1E"/>
                 </a:solidFill>
                 <a:latin typeface="Amiri" pitchFamily="2" charset="-78"/>
+                <a:ea typeface="Amiri" pitchFamily="2" charset="-78"/>
                 <a:cs typeface="Amiri" pitchFamily="2" charset="-78"/>
               </a:rPr>
               <a:t>قَيِّمْ عَمَلَكَ</a:t>
@@ -12384,6 +12471,7 @@
                   <a:srgbClr val="FFFFFF"/>
                 </a:solidFill>
                 <a:latin typeface="Amiri" pitchFamily="2" charset="-78"/>
+                <a:ea typeface="Amiri" pitchFamily="2" charset="-78"/>
                 <a:cs typeface="Amiri" pitchFamily="2" charset="-78"/>
               </a:rPr>
               <a:t>أَحْسَنْتُمْ! إِلَى اللِّقَاءِ</a:t>
@@ -12536,6 +12624,7 @@
                   <a:srgbClr val="D4AF37"/>
                 </a:solidFill>
                 <a:latin typeface="Amiri" pitchFamily="2" charset="-78"/>
+                <a:ea typeface="Amiri" pitchFamily="2" charset="-78"/>
                 <a:cs typeface="Amiri" pitchFamily="2" charset="-78"/>
               </a:rPr>
               <a:t>وَرْشَةُ التَّدْرِيبِ</a:t>
@@ -12669,6 +12758,7 @@
                   <a:srgbClr val="D4AF37"/>
                 </a:solidFill>
                 <a:latin typeface="Amiri" pitchFamily="2" charset="-78"/>
+                <a:ea typeface="Amiri" pitchFamily="2" charset="-78"/>
                 <a:cs typeface="Amiri" pitchFamily="2" charset="-78"/>
               </a:rPr>
               <a:t>م</a:t>
@@ -12989,6 +13079,7 @@
                   <a:srgbClr val="8A6D1E"/>
                 </a:solidFill>
                 <a:latin typeface="Amiri" pitchFamily="2" charset="-78"/>
+                <a:ea typeface="Amiri" pitchFamily="2" charset="-78"/>
                 <a:cs typeface="Amiri" pitchFamily="2" charset="-78"/>
               </a:rPr>
               <a:t>آدَابُ الصَّفِّ</a:t>
@@ -14520,6 +14611,7 @@
                   <a:srgbClr val="D4AF37"/>
                 </a:solidFill>
                 <a:latin typeface="Amiri" pitchFamily="2" charset="-78"/>
+                <a:ea typeface="Amiri" pitchFamily="2" charset="-78"/>
                 <a:cs typeface="Amiri" pitchFamily="2" charset="-78"/>
               </a:rPr>
               <a:t>م</a:t>
@@ -14840,6 +14932,7 @@
                   <a:srgbClr val="8A6D1E"/>
                 </a:solidFill>
                 <a:latin typeface="Amiri" pitchFamily="2" charset="-78"/>
+                <a:ea typeface="Amiri" pitchFamily="2" charset="-78"/>
                 <a:cs typeface="Amiri" pitchFamily="2" charset="-78"/>
               </a:rPr>
               <a:t>خَرِيطَةُ الوَرْشَةِ</a:t>
@@ -15154,6 +15247,7 @@
                   <a:srgbClr val="1B3B6F"/>
                 </a:solidFill>
                 <a:latin typeface="Amiri" pitchFamily="2" charset="-78"/>
+                <a:ea typeface="Amiri" pitchFamily="2" charset="-78"/>
                 <a:cs typeface="Amiri" pitchFamily="2" charset="-78"/>
               </a:rPr>
               <a:t>كَيْفَ</a:t>
@@ -15430,6 +15524,7 @@
                   <a:srgbClr val="1E6B52"/>
                 </a:solidFill>
                 <a:latin typeface="Amiri" pitchFamily="2" charset="-78"/>
+                <a:ea typeface="Amiri" pitchFamily="2" charset="-78"/>
                 <a:cs typeface="Amiri" pitchFamily="2" charset="-78"/>
               </a:rPr>
               <a:t>الاسْتِمَارَةُ</a:t>
@@ -15706,6 +15801,7 @@
                   <a:srgbClr val="1E6B52"/>
                 </a:solidFill>
                 <a:latin typeface="Amiri" pitchFamily="2" charset="-78"/>
+                <a:ea typeface="Amiri" pitchFamily="2" charset="-78"/>
                 <a:cs typeface="Amiri" pitchFamily="2" charset="-78"/>
               </a:rPr>
               <a:t>الرِّسَالَةُ</a:t>
@@ -15982,6 +16078,7 @@
                   <a:srgbClr val="1E6B52"/>
                 </a:solidFill>
                 <a:latin typeface="Amiri" pitchFamily="2" charset="-78"/>
+                <a:ea typeface="Amiri" pitchFamily="2" charset="-78"/>
                 <a:cs typeface="Amiri" pitchFamily="2" charset="-78"/>
               </a:rPr>
               <a:t>المَقَالُ</a:t>
@@ -16258,6 +16355,7 @@
                   <a:srgbClr val="8A6D1E"/>
                 </a:solidFill>
                 <a:latin typeface="Amiri" pitchFamily="2" charset="-78"/>
+                <a:ea typeface="Amiri" pitchFamily="2" charset="-78"/>
                 <a:cs typeface="Amiri" pitchFamily="2" charset="-78"/>
               </a:rPr>
               <a:t>قَيِّمْ</a:t>
@@ -16501,6 +16599,7 @@
                   <a:srgbClr val="D4AF37"/>
                 </a:solidFill>
                 <a:latin typeface="Amiri" pitchFamily="2" charset="-78"/>
+                <a:ea typeface="Amiri" pitchFamily="2" charset="-78"/>
                 <a:cs typeface="Amiri" pitchFamily="2" charset="-78"/>
               </a:rPr>
               <a:t>م</a:t>
@@ -16821,6 +16920,7 @@
                   <a:srgbClr val="8A6D1E"/>
                 </a:solidFill>
                 <a:latin typeface="Amiri" pitchFamily="2" charset="-78"/>
+                <a:ea typeface="Amiri" pitchFamily="2" charset="-78"/>
                 <a:cs typeface="Amiri" pitchFamily="2" charset="-78"/>
               </a:rPr>
               <a:t>امْتِحَانُ الكِتَابَةِ</a:t>
@@ -17445,6 +17545,7 @@
                   <a:srgbClr val="1B3B6F"/>
                 </a:solidFill>
                 <a:latin typeface="Amiri" pitchFamily="2" charset="-78"/>
+                <a:ea typeface="Amiri" pitchFamily="2" charset="-78"/>
                 <a:cs typeface="Amiri" pitchFamily="2" charset="-78"/>
               </a:rPr>
               <a:t>تَسْتَغْرِقُ الرِّحْلَةُ نِصْفَ سَاعَةٍ</a:t>
@@ -17544,6 +17645,7 @@
                   <a:srgbClr val="1B3B6F"/>
                 </a:solidFill>
                 <a:latin typeface="Amiri" pitchFamily="2" charset="-78"/>
+                <a:ea typeface="Amiri" pitchFamily="2" charset="-78"/>
                 <a:cs typeface="Amiri" pitchFamily="2" charset="-78"/>
               </a:rPr>
               <a:t>القِطَارُ أَسْرَعُ مِنَ الحَافِلَةِ</a:t>
@@ -17643,6 +17745,7 @@
                   <a:srgbClr val="1B3B6F"/>
                 </a:solidFill>
                 <a:latin typeface="Amiri" pitchFamily="2" charset="-78"/>
+                <a:ea typeface="Amiri" pitchFamily="2" charset="-78"/>
                 <a:cs typeface="Amiri" pitchFamily="2" charset="-78"/>
               </a:rPr>
               <a:t>أُفَضِّلُ … عَلَى … لِأَنَّ …</a:t>
@@ -17814,6 +17917,7 @@
                   <a:srgbClr val="D4AF37"/>
                 </a:solidFill>
                 <a:latin typeface="Amiri" pitchFamily="2" charset="-78"/>
+                <a:ea typeface="Amiri" pitchFamily="2" charset="-78"/>
                 <a:cs typeface="Amiri" pitchFamily="2" charset="-78"/>
               </a:rPr>
               <a:t>م</a:t>
@@ -18134,6 +18238,7 @@
                   <a:srgbClr val="8A6D1E"/>
                 </a:solidFill>
                 <a:latin typeface="Amiri" pitchFamily="2" charset="-78"/>
+                <a:ea typeface="Amiri" pitchFamily="2" charset="-78"/>
                 <a:cs typeface="Amiri" pitchFamily="2" charset="-78"/>
               </a:rPr>
               <a:t>طَلَبُ بِطَاقَةِ الحَافِلَةِ</a:t>
@@ -18490,6 +18595,7 @@
                   <a:srgbClr val="1B3B6F"/>
                 </a:solidFill>
                 <a:latin typeface="Amiri" pitchFamily="2" charset="-78"/>
+                <a:ea typeface="Amiri" pitchFamily="2" charset="-78"/>
                 <a:cs typeface="Amiri" pitchFamily="2" charset="-78"/>
               </a:rPr>
               <a:t>الاسْمُ</a:t>
@@ -18734,6 +18840,7 @@
                   <a:srgbClr val="1B3B6F"/>
                 </a:solidFill>
                 <a:latin typeface="Amiri" pitchFamily="2" charset="-78"/>
+                <a:ea typeface="Amiri" pitchFamily="2" charset="-78"/>
                 <a:cs typeface="Amiri" pitchFamily="2" charset="-78"/>
               </a:rPr>
               <a:t>العُنْوَانُ</a:t>
@@ -18978,6 +19085,7 @@
                   <a:srgbClr val="1B3B6F"/>
                 </a:solidFill>
                 <a:latin typeface="Amiri" pitchFamily="2" charset="-78"/>
+                <a:ea typeface="Amiri" pitchFamily="2" charset="-78"/>
                 <a:cs typeface="Amiri" pitchFamily="2" charset="-78"/>
               </a:rPr>
               <a:t>اسْمُ المَدْرَسَةِ</a:t>
@@ -19222,6 +19330,7 @@
                   <a:srgbClr val="1B3B6F"/>
                 </a:solidFill>
                 <a:latin typeface="Amiri" pitchFamily="2" charset="-78"/>
+                <a:ea typeface="Amiri" pitchFamily="2" charset="-78"/>
                 <a:cs typeface="Amiri" pitchFamily="2" charset="-78"/>
               </a:rPr>
               <a:t>المَحَطَّةُ القَرِيبَةُ مِنْ بَيْتِكَ</a:t>
@@ -19466,6 +19575,7 @@
                   <a:srgbClr val="1B3B6F"/>
                 </a:solidFill>
                 <a:latin typeface="Amiri" pitchFamily="2" charset="-78"/>
+                <a:ea typeface="Amiri" pitchFamily="2" charset="-78"/>
                 <a:cs typeface="Amiri" pitchFamily="2" charset="-78"/>
               </a:rPr>
               <a:t>وَقْتُ الخُرُوجِ مِنَ البَيْتِ</a:t>
@@ -19710,6 +19820,7 @@
                   <a:srgbClr val="1B3B6F"/>
                 </a:solidFill>
                 <a:latin typeface="Amiri" pitchFamily="2" charset="-78"/>
+                <a:ea typeface="Amiri" pitchFamily="2" charset="-78"/>
                 <a:cs typeface="Amiri" pitchFamily="2" charset="-78"/>
               </a:rPr>
               <a:t>أَيَّامُ السَّفَرِ</a:t>
@@ -19954,6 +20065,7 @@
                   <a:srgbClr val="1B3B6F"/>
                 </a:solidFill>
                 <a:latin typeface="Amiri" pitchFamily="2" charset="-78"/>
+                <a:ea typeface="Amiri" pitchFamily="2" charset="-78"/>
                 <a:cs typeface="Amiri" pitchFamily="2" charset="-78"/>
               </a:rPr>
               <a:t>كَيْفَ تَذْهَبُ الآنَ؟</a:t>
@@ -20133,6 +20245,7 @@
                   <a:srgbClr val="1B3B6F"/>
                 </a:solidFill>
                 <a:latin typeface="Amiri" pitchFamily="2" charset="-78"/>
+                <a:ea typeface="Amiri" pitchFamily="2" charset="-78"/>
                 <a:cs typeface="Amiri" pitchFamily="2" charset="-78"/>
               </a:rPr>
               <a:t>جُمْلَةٌ: لِمَاذَا تُرِيدُ البِطَاقَةَ؟</a:t>
@@ -20342,6 +20455,7 @@
                   <a:srgbClr val="D4AF37"/>
                 </a:solidFill>
                 <a:latin typeface="Amiri" pitchFamily="2" charset="-78"/>
+                <a:ea typeface="Amiri" pitchFamily="2" charset="-78"/>
                 <a:cs typeface="Amiri" pitchFamily="2" charset="-78"/>
               </a:rPr>
               <a:t>م</a:t>
@@ -20662,6 +20776,7 @@
                   <a:srgbClr val="8A6D1E"/>
                 </a:solidFill>
                 <a:latin typeface="Amiri" pitchFamily="2" charset="-78"/>
+                <a:ea typeface="Amiri" pitchFamily="2" charset="-78"/>
                 <a:cs typeface="Amiri" pitchFamily="2" charset="-78"/>
               </a:rPr>
               <a:t>نَمُوذَجُ الإِجَابَةِ</a:t>
@@ -20980,6 +21095,7 @@
                   <a:srgbClr val="1B3B6F"/>
                 </a:solidFill>
                 <a:latin typeface="Amiri" pitchFamily="2" charset="-78"/>
+                <a:ea typeface="Amiri" pitchFamily="2" charset="-78"/>
                 <a:cs typeface="Amiri" pitchFamily="2" charset="-78"/>
               </a:rPr>
               <a:t>سَارَةُ عَلِيٌّ</a:t>
@@ -21018,6 +21134,7 @@
                   <a:srgbClr val="1B3B6F"/>
                 </a:solidFill>
                 <a:latin typeface="Amiri" pitchFamily="2" charset="-78"/>
+                <a:ea typeface="Amiri" pitchFamily="2" charset="-78"/>
                 <a:cs typeface="Amiri" pitchFamily="2" charset="-78"/>
               </a:rPr>
               <a:t>الاسْمُ</a:t>
@@ -21159,6 +21276,7 @@
                   <a:srgbClr val="1B3B6F"/>
                 </a:solidFill>
                 <a:latin typeface="Amiri" pitchFamily="2" charset="-78"/>
+                <a:ea typeface="Amiri" pitchFamily="2" charset="-78"/>
                 <a:cs typeface="Amiri" pitchFamily="2" charset="-78"/>
               </a:rPr>
               <a:t>شَارِعُ النَّخِيلِ، المَنَامَةُ</a:t>
@@ -21197,6 +21315,7 @@
                   <a:srgbClr val="1B3B6F"/>
                 </a:solidFill>
                 <a:latin typeface="Amiri" pitchFamily="2" charset="-78"/>
+                <a:ea typeface="Amiri" pitchFamily="2" charset="-78"/>
                 <a:cs typeface="Amiri" pitchFamily="2" charset="-78"/>
               </a:rPr>
               <a:t>العُنْوَانُ</a:t>
@@ -21338,6 +21457,7 @@
                   <a:srgbClr val="1B3B6F"/>
                 </a:solidFill>
                 <a:latin typeface="Amiri" pitchFamily="2" charset="-78"/>
+                <a:ea typeface="Amiri" pitchFamily="2" charset="-78"/>
                 <a:cs typeface="Amiri" pitchFamily="2" charset="-78"/>
               </a:rPr>
               <a:t>مَدْرَسَةُ النُّورِ</a:t>
@@ -21376,6 +21496,7 @@
                   <a:srgbClr val="1B3B6F"/>
                 </a:solidFill>
                 <a:latin typeface="Amiri" pitchFamily="2" charset="-78"/>
+                <a:ea typeface="Amiri" pitchFamily="2" charset="-78"/>
                 <a:cs typeface="Amiri" pitchFamily="2" charset="-78"/>
               </a:rPr>
               <a:t>اسْمُ المَدْرَسَةِ</a:t>
@@ -21517,6 +21638,7 @@
                   <a:srgbClr val="1B3B6F"/>
                 </a:solidFill>
                 <a:latin typeface="Amiri" pitchFamily="2" charset="-78"/>
+                <a:ea typeface="Amiri" pitchFamily="2" charset="-78"/>
                 <a:cs typeface="Amiri" pitchFamily="2" charset="-78"/>
               </a:rPr>
               <a:t>مَحَطَّةُ السُّوقِ</a:t>
@@ -21555,6 +21677,7 @@
                   <a:srgbClr val="1B3B6F"/>
                 </a:solidFill>
                 <a:latin typeface="Amiri" pitchFamily="2" charset="-78"/>
+                <a:ea typeface="Amiri" pitchFamily="2" charset="-78"/>
                 <a:cs typeface="Amiri" pitchFamily="2" charset="-78"/>
               </a:rPr>
               <a:t>المَحَطَّةُ القَرِيبَةُ مِنْ بَيْتِكَ</a:t>
@@ -21696,6 +21819,7 @@
                   <a:srgbClr val="1B3B6F"/>
                 </a:solidFill>
                 <a:latin typeface="Amiri" pitchFamily="2" charset="-78"/>
+                <a:ea typeface="Amiri" pitchFamily="2" charset="-78"/>
                 <a:cs typeface="Amiri" pitchFamily="2" charset="-78"/>
               </a:rPr>
               <a:t>السَّابِعَةُ وَالرُّبْعُ</a:t>
@@ -21734,6 +21858,7 @@
                   <a:srgbClr val="1B3B6F"/>
                 </a:solidFill>
                 <a:latin typeface="Amiri" pitchFamily="2" charset="-78"/>
+                <a:ea typeface="Amiri" pitchFamily="2" charset="-78"/>
                 <a:cs typeface="Amiri" pitchFamily="2" charset="-78"/>
               </a:rPr>
               <a:t>وَقْتُ الخُرُوجِ مِنَ البَيْتِ</a:t>
@@ -21875,6 +22000,7 @@
                   <a:srgbClr val="1B3B6F"/>
                 </a:solidFill>
                 <a:latin typeface="Amiri" pitchFamily="2" charset="-78"/>
+                <a:ea typeface="Amiri" pitchFamily="2" charset="-78"/>
                 <a:cs typeface="Amiri" pitchFamily="2" charset="-78"/>
               </a:rPr>
               <a:t>مِنَ الأَحَدِ إِلَى الخَمِيسِ</a:t>
@@ -21913,6 +22039,7 @@
                   <a:srgbClr val="1B3B6F"/>
                 </a:solidFill>
                 <a:latin typeface="Amiri" pitchFamily="2" charset="-78"/>
+                <a:ea typeface="Amiri" pitchFamily="2" charset="-78"/>
                 <a:cs typeface="Amiri" pitchFamily="2" charset="-78"/>
               </a:rPr>
               <a:t>أَيَّامُ السَّفَرِ</a:t>
@@ -22054,6 +22181,7 @@
                   <a:srgbClr val="1B3B6F"/>
                 </a:solidFill>
                 <a:latin typeface="Amiri" pitchFamily="2" charset="-78"/>
+                <a:ea typeface="Amiri" pitchFamily="2" charset="-78"/>
                 <a:cs typeface="Amiri" pitchFamily="2" charset="-78"/>
               </a:rPr>
               <a:t>بِالسَّيَّارَةِ مَعَ أَبِي</a:t>
@@ -22092,6 +22220,7 @@
                   <a:srgbClr val="1B3B6F"/>
                 </a:solidFill>
                 <a:latin typeface="Amiri" pitchFamily="2" charset="-78"/>
+                <a:ea typeface="Amiri" pitchFamily="2" charset="-78"/>
                 <a:cs typeface="Amiri" pitchFamily="2" charset="-78"/>
               </a:rPr>
               <a:t>كَيْفَ تَذْهَبُ الآنَ؟</a:t>
@@ -22233,6 +22362,7 @@
                   <a:srgbClr val="1B3B6F"/>
                 </a:solidFill>
                 <a:latin typeface="Amiri" pitchFamily="2" charset="-78"/>
+                <a:ea typeface="Amiri" pitchFamily="2" charset="-78"/>
                 <a:cs typeface="Amiri" pitchFamily="2" charset="-78"/>
               </a:rPr>
               <a:t>أُرِيدُ البِطَاقَةَ لِأَنَّ الحَافِلَةَ أَرْخَصُ وَأَفْضَلُ لِلْبِيئَةِ.</a:t>
@@ -22271,6 +22401,7 @@
                   <a:srgbClr val="1B3B6F"/>
                 </a:solidFill>
                 <a:latin typeface="Amiri" pitchFamily="2" charset="-78"/>
+                <a:ea typeface="Amiri" pitchFamily="2" charset="-78"/>
                 <a:cs typeface="Amiri" pitchFamily="2" charset="-78"/>
               </a:rPr>
               <a:t>جُمْلَةٌ: لِمَاذَا تُرِيدُ البِطَاقَةَ؟</a:t>
@@ -22480,6 +22611,7 @@
                   <a:srgbClr val="D4AF37"/>
                 </a:solidFill>
                 <a:latin typeface="Amiri" pitchFamily="2" charset="-78"/>
+                <a:ea typeface="Amiri" pitchFamily="2" charset="-78"/>
                 <a:cs typeface="Amiri" pitchFamily="2" charset="-78"/>
               </a:rPr>
               <a:t>م</a:t>
@@ -22800,6 +22932,7 @@
                   <a:srgbClr val="8A6D1E"/>
                 </a:solidFill>
                 <a:latin typeface="Amiri" pitchFamily="2" charset="-78"/>
+                <a:ea typeface="Amiri" pitchFamily="2" charset="-78"/>
                 <a:cs typeface="Amiri" pitchFamily="2" charset="-78"/>
               </a:rPr>
               <a:t>رِسَالَةٌ عَنْ رِحْلَتِي إِلَى المَدْرَسَةِ</a:t>
@@ -23275,6 +23408,7 @@
                   <a:srgbClr val="1B3B6F"/>
                 </a:solidFill>
                 <a:latin typeface="Amiri" pitchFamily="2" charset="-78"/>
+                <a:ea typeface="Amiri" pitchFamily="2" charset="-78"/>
                 <a:cs typeface="Amiri" pitchFamily="2" charset="-78"/>
               </a:rPr>
               <a:t>أَذْهَبُ إِلَى المَدْرَسَةِ بِالحَافِلَةِ</a:t>
@@ -23351,6 +23485,7 @@
                   <a:srgbClr val="1B3B6F"/>
                 </a:solidFill>
                 <a:latin typeface="Amiri" pitchFamily="2" charset="-78"/>
+                <a:ea typeface="Amiri" pitchFamily="2" charset="-78"/>
                 <a:cs typeface="Amiri" pitchFamily="2" charset="-78"/>
               </a:rPr>
               <a:t>تَسْتَغْرِقُ الرِّحْلَةُ …</a:t>
@@ -23427,6 +23562,7 @@
                   <a:srgbClr val="1B3B6F"/>
                 </a:solidFill>
                 <a:latin typeface="Amiri" pitchFamily="2" charset="-78"/>
+                <a:ea typeface="Amiri" pitchFamily="2" charset="-78"/>
                 <a:cs typeface="Amiri" pitchFamily="2" charset="-78"/>
               </a:rPr>
               <a:t>أُفَضِّلُ … عَلَى … لِأَنَّ …</a:t>
@@ -23503,6 +23639,7 @@
                   <a:srgbClr val="1B3B6F"/>
                 </a:solidFill>
                 <a:latin typeface="Amiri" pitchFamily="2" charset="-78"/>
+                <a:ea typeface="Amiri" pitchFamily="2" charset="-78"/>
                 <a:cs typeface="Amiri" pitchFamily="2" charset="-78"/>
               </a:rPr>
               <a:t>أَمْسِ تَأَخَّرَتِ الحَافِلَةُ</a:t>
@@ -23674,6 +23811,7 @@
                   <a:srgbClr val="D4AF37"/>
                 </a:solidFill>
                 <a:latin typeface="Amiri" pitchFamily="2" charset="-78"/>
+                <a:ea typeface="Amiri" pitchFamily="2" charset="-78"/>
                 <a:cs typeface="Amiri" pitchFamily="2" charset="-78"/>
               </a:rPr>
               <a:t>م</a:t>
@@ -23994,6 +24132,7 @@
                   <a:srgbClr val="8A6D1E"/>
                 </a:solidFill>
                 <a:latin typeface="Amiri" pitchFamily="2" charset="-78"/>
+                <a:ea typeface="Amiri" pitchFamily="2" charset="-78"/>
                 <a:cs typeface="Amiri" pitchFamily="2" charset="-78"/>
               </a:rPr>
               <a:t>نَصُّ السُّؤَالِ</a:t>
@@ -24274,6 +24413,7 @@
                   <a:srgbClr val="1B3B6F"/>
                 </a:solidFill>
                 <a:latin typeface="Amiri" pitchFamily="2" charset="-78"/>
+                <a:ea typeface="Amiri" pitchFamily="2" charset="-78"/>
                 <a:cs typeface="Amiri" pitchFamily="2" charset="-78"/>
               </a:rPr>
               <a:t>بَدَأْتِ الدِّرَاسَةَ فِي مَدْرَسَةٍ جَدِيدَةٍ. اكْتُبِي رِسَالَةً إِلَى صَدِيقَتِكِ (٨٠–٩٠ كَلِمَةً).</a:t>
@@ -24415,6 +24555,7 @@
                   <a:srgbClr val="1B3B6F"/>
                 </a:solidFill>
                 <a:latin typeface="Amiri" pitchFamily="2" charset="-78"/>
+                <a:ea typeface="Amiri" pitchFamily="2" charset="-78"/>
                 <a:cs typeface="Amiri" pitchFamily="2" charset="-78"/>
               </a:rPr>
               <a:t>كَيْفَ تَذْهَبِينَ إِلَى المَدْرَسَةِ؟ وَمَتَى تَخْرُجِينَ؟</a:t>
@@ -24556,6 +24697,7 @@
                   <a:srgbClr val="1B3B6F"/>
                 </a:solidFill>
                 <a:latin typeface="Amiri" pitchFamily="2" charset="-78"/>
+                <a:ea typeface="Amiri" pitchFamily="2" charset="-78"/>
                 <a:cs typeface="Amiri" pitchFamily="2" charset="-78"/>
               </a:rPr>
               <a:t>كَمْ تَسْتَغْرِقُ الرِّحْلَةُ؟ وَمَعَ مَنْ تَذْهَبِينَ؟</a:t>
@@ -24697,6 +24839,7 @@
                   <a:srgbClr val="1B3B6F"/>
                 </a:solidFill>
                 <a:latin typeface="Amiri" pitchFamily="2" charset="-78"/>
+                <a:ea typeface="Amiri" pitchFamily="2" charset="-78"/>
                 <a:cs typeface="Amiri" pitchFamily="2" charset="-78"/>
               </a:rPr>
               <a:t>مَا رَأْيُكِ فِي هٰذِهِ الوَسِيلَةِ؟</a:t>
@@ -24838,6 +24981,7 @@
                   <a:srgbClr val="1B3B6F"/>
                 </a:solidFill>
                 <a:latin typeface="Amiri" pitchFamily="2" charset="-78"/>
+                <a:ea typeface="Amiri" pitchFamily="2" charset="-78"/>
                 <a:cs typeface="Amiri" pitchFamily="2" charset="-78"/>
               </a:rPr>
               <a:t>مَاذَا حَدَثَ أَمْسِ فِي الطَّرِيقِ؟ وَكَيْفَ سَتَذْهَبِينَ فِي السَّنَةِ القَادِمَةِ؟</a:t>
@@ -25047,6 +25191,7 @@
                   <a:srgbClr val="D4AF37"/>
                 </a:solidFill>
                 <a:latin typeface="Amiri" pitchFamily="2" charset="-78"/>
+                <a:ea typeface="Amiri" pitchFamily="2" charset="-78"/>
                 <a:cs typeface="Amiri" pitchFamily="2" charset="-78"/>
               </a:rPr>
               <a:t>م</a:t>
@@ -25367,6 +25512,7 @@
                   <a:srgbClr val="8A6D1E"/>
                 </a:solidFill>
                 <a:latin typeface="Amiri" pitchFamily="2" charset="-78"/>
+                <a:ea typeface="Amiri" pitchFamily="2" charset="-78"/>
                 <a:cs typeface="Amiri" pitchFamily="2" charset="-78"/>
               </a:rPr>
               <a:t>قَوَالِبُ الكِتَابَةِ</a:t>
@@ -25647,6 +25793,7 @@
                   <a:srgbClr val="1B3B6F"/>
                 </a:solidFill>
                 <a:latin typeface="Amiri" pitchFamily="2" charset="-78"/>
+                <a:ea typeface="Amiri" pitchFamily="2" charset="-78"/>
                 <a:cs typeface="Amiri" pitchFamily="2" charset="-78"/>
               </a:rPr>
               <a:t>مَرْحَبًا يَا ______ ، كَيْفَ حَالُكِ؟</a:t>
@@ -25853,6 +26000,7 @@
                   <a:srgbClr val="1B3B6F"/>
                 </a:solidFill>
                 <a:latin typeface="Amiri" pitchFamily="2" charset="-78"/>
+                <a:ea typeface="Amiri" pitchFamily="2" charset="-78"/>
                 <a:cs typeface="Amiri" pitchFamily="2" charset="-78"/>
               </a:rPr>
               <a:t>أَذْهَبُ إِلَى المَدْرَسَةِ ______ . أَخْرُجُ فِي السَّاعَةِ ______ .</a:t>
@@ -26059,6 +26207,7 @@
                   <a:srgbClr val="1B3B6F"/>
                 </a:solidFill>
                 <a:latin typeface="Amiri" pitchFamily="2" charset="-78"/>
+                <a:ea typeface="Amiri" pitchFamily="2" charset="-78"/>
                 <a:cs typeface="Amiri" pitchFamily="2" charset="-78"/>
               </a:rPr>
               <a:t>تَسْتَغْرِقُ الرِّحْلَةُ ______ . أَذْهَبُ مَعَ ______ .</a:t>
@@ -26265,6 +26414,7 @@
                   <a:srgbClr val="1B3B6F"/>
                 </a:solidFill>
                 <a:latin typeface="Amiri" pitchFamily="2" charset="-78"/>
+                <a:ea typeface="Amiri" pitchFamily="2" charset="-78"/>
                 <a:cs typeface="Amiri" pitchFamily="2" charset="-78"/>
               </a:rPr>
               <a:t>______ رَخِيصَةٌ / سَرِيعَةٌ، لٰكِنَّهَا ______ .</a:t>
@@ -26471,6 +26621,7 @@
                   <a:srgbClr val="1B3B6F"/>
                 </a:solidFill>
                 <a:latin typeface="Amiri" pitchFamily="2" charset="-78"/>
+                <a:ea typeface="Amiri" pitchFamily="2" charset="-78"/>
                 <a:cs typeface="Amiri" pitchFamily="2" charset="-78"/>
               </a:rPr>
               <a:t>أَمْسِ ______ . فِي السَّنَةِ القَادِمَةِ سَأَذْهَبُ ______ .</a:t>
@@ -26677,6 +26828,7 @@
                   <a:srgbClr val="1B3B6F"/>
                 </a:solidFill>
                 <a:latin typeface="Amiri" pitchFamily="2" charset="-78"/>
+                <a:ea typeface="Amiri" pitchFamily="2" charset="-78"/>
                 <a:cs typeface="Amiri" pitchFamily="2" charset="-78"/>
               </a:rPr>
               <a:t>مَعَ السَّلَامَةِ، ______</a:t>
@@ -26916,13 +27068,9 @@
     <a:fontScheme name="Office">
       <a:majorFont>
         <a:latin typeface="Calibri Light" panose="020F0302020204030204"/>
-        <a:ea typeface=""/>
-        <a:cs typeface=""/>
-        <a:font script="Jpan" typeface="游ゴシック Light"/>
-        <a:font script="Hang" typeface="맑은 고딕"/>
-        <a:font script="Hans" typeface="等线 Light"/>
-        <a:font script="Hant" typeface="新細明體"/>
-        <a:font script="Arab" typeface="Times New Roman"/>
+        <a:ea typeface="Amiri" pitchFamily="2" charset="-78"/>
+        <a:cs typeface="Amiri" pitchFamily="2" charset="-78"/>
+        <a:font script="Arab" typeface="Amiri"/>
         <a:font script="Hebr" typeface="Times New Roman"/>
         <a:font script="Thai" typeface="Angsana New"/>
         <a:font script="Ethi" typeface="Nyala"/>
@@ -26968,13 +27116,9 @@
       </a:majorFont>
       <a:minorFont>
         <a:latin typeface="Calibri" panose="020F0502020204030204"/>
-        <a:ea typeface=""/>
-        <a:cs typeface=""/>
-        <a:font script="Jpan" typeface="游ゴシック"/>
-        <a:font script="Hang" typeface="맑은 고딕"/>
-        <a:font script="Hans" typeface="等线"/>
-        <a:font script="Hant" typeface="新細明體"/>
-        <a:font script="Arab" typeface="Arial"/>
+        <a:ea typeface="Amiri" pitchFamily="2" charset="-78"/>
+        <a:cs typeface="Amiri" pitchFamily="2" charset="-78"/>
+        <a:font script="Arab" typeface="Amiri"/>
         <a:font script="Hebr" typeface="Arial"/>
         <a:font script="Thai" typeface="Cordia New"/>
         <a:font script="Ethi" typeface="Nyala"/>

--- a/Topic_A/Exam_Practice/AT-A-L09_Writing_Workshop_Travel_and_Transport_for_Everyday_Journeys.pptx
+++ b/Topic_A/Exam_Practice/AT-A-L09_Writing_Workshop_Travel_and_Transport_for_Everyday_Journeys.pptx
@@ -3848,7 +3848,7 @@
                 <a:solidFill>
                   <a:srgbClr val="FFFFFF"/>
                 </a:solidFill>
-                <a:latin typeface="Calibri" pitchFamily="34" charset="0"/>
+                <a:latin typeface="Amiri" pitchFamily="2" charset="-78"/>
                 <a:ea typeface="Amiri" pitchFamily="2" charset="-78"/>
                 <a:cs typeface="Amiri" pitchFamily="2" charset="-78"/>
               </a:rPr>
@@ -3914,7 +3914,7 @@
                 <a:solidFill>
                   <a:srgbClr val="FFFFFF"/>
                 </a:solidFill>
-                <a:latin typeface="Calibri" pitchFamily="34" charset="0"/>
+                <a:latin typeface="Amiri" pitchFamily="2" charset="-78"/>
                 <a:ea typeface="Amiri" pitchFamily="2" charset="-78"/>
                 <a:cs typeface="Amiri" pitchFamily="2" charset="-78"/>
               </a:rPr>
@@ -3980,7 +3980,7 @@
                 <a:solidFill>
                   <a:srgbClr val="FFFFFF"/>
                 </a:solidFill>
-                <a:latin typeface="Calibri" pitchFamily="34" charset="0"/>
+                <a:latin typeface="Amiri" pitchFamily="2" charset="-78"/>
                 <a:ea typeface="Amiri" pitchFamily="2" charset="-78"/>
                 <a:cs typeface="Amiri" pitchFamily="2" charset="-78"/>
               </a:rPr>
@@ -4046,7 +4046,7 @@
                 <a:solidFill>
                   <a:srgbClr val="FFFFFF"/>
                 </a:solidFill>
-                <a:latin typeface="Calibri" pitchFamily="34" charset="0"/>
+                <a:latin typeface="Amiri" pitchFamily="2" charset="-78"/>
                 <a:ea typeface="Amiri" pitchFamily="2" charset="-78"/>
                 <a:cs typeface="Amiri" pitchFamily="2" charset="-78"/>
               </a:rPr>
@@ -4844,7 +4844,7 @@
                 <a:solidFill>
                   <a:srgbClr val="FFFFFF"/>
                 </a:solidFill>
-                <a:latin typeface="Calibri" pitchFamily="34" charset="0"/>
+                <a:latin typeface="Amiri" pitchFamily="2" charset="-78"/>
                 <a:ea typeface="Amiri" pitchFamily="2" charset="-78"/>
                 <a:cs typeface="Amiri" pitchFamily="2" charset="-78"/>
               </a:rPr>
@@ -4910,7 +4910,7 @@
                 <a:solidFill>
                   <a:srgbClr val="FFFFFF"/>
                 </a:solidFill>
-                <a:latin typeface="Calibri" pitchFamily="34" charset="0"/>
+                <a:latin typeface="Amiri" pitchFamily="2" charset="-78"/>
                 <a:ea typeface="Amiri" pitchFamily="2" charset="-78"/>
                 <a:cs typeface="Amiri" pitchFamily="2" charset="-78"/>
               </a:rPr>
@@ -4976,7 +4976,7 @@
                 <a:solidFill>
                   <a:srgbClr val="FFFFFF"/>
                 </a:solidFill>
-                <a:latin typeface="Calibri" pitchFamily="34" charset="0"/>
+                <a:latin typeface="Amiri" pitchFamily="2" charset="-78"/>
                 <a:ea typeface="Amiri" pitchFamily="2" charset="-78"/>
                 <a:cs typeface="Amiri" pitchFamily="2" charset="-78"/>
               </a:rPr>
@@ -5042,7 +5042,7 @@
                 <a:solidFill>
                   <a:srgbClr val="FFFFFF"/>
                 </a:solidFill>
-                <a:latin typeface="Calibri" pitchFamily="34" charset="0"/>
+                <a:latin typeface="Amiri" pitchFamily="2" charset="-78"/>
                 <a:ea typeface="Amiri" pitchFamily="2" charset="-78"/>
                 <a:cs typeface="Amiri" pitchFamily="2" charset="-78"/>
               </a:rPr>
@@ -8602,7 +8602,7 @@
                 <a:solidFill>
                   <a:srgbClr val="FFFFFF"/>
                 </a:solidFill>
-                <a:latin typeface="Calibri" pitchFamily="34" charset="0"/>
+                <a:latin typeface="Amiri" pitchFamily="2" charset="-78"/>
                 <a:ea typeface="Amiri" pitchFamily="2" charset="-78"/>
                 <a:cs typeface="Amiri" pitchFamily="2" charset="-78"/>
               </a:rPr>
@@ -8668,7 +8668,7 @@
                 <a:solidFill>
                   <a:srgbClr val="FFFFFF"/>
                 </a:solidFill>
-                <a:latin typeface="Calibri" pitchFamily="34" charset="0"/>
+                <a:latin typeface="Amiri" pitchFamily="2" charset="-78"/>
                 <a:ea typeface="Amiri" pitchFamily="2" charset="-78"/>
                 <a:cs typeface="Amiri" pitchFamily="2" charset="-78"/>
               </a:rPr>
@@ -8734,7 +8734,7 @@
                 <a:solidFill>
                   <a:srgbClr val="FFFFFF"/>
                 </a:solidFill>
-                <a:latin typeface="Calibri" pitchFamily="34" charset="0"/>
+                <a:latin typeface="Amiri" pitchFamily="2" charset="-78"/>
                 <a:ea typeface="Amiri" pitchFamily="2" charset="-78"/>
                 <a:cs typeface="Amiri" pitchFamily="2" charset="-78"/>
               </a:rPr>
@@ -8800,7 +8800,7 @@
                 <a:solidFill>
                   <a:srgbClr val="FFFFFF"/>
                 </a:solidFill>
-                <a:latin typeface="Calibri" pitchFamily="34" charset="0"/>
+                <a:latin typeface="Amiri" pitchFamily="2" charset="-78"/>
                 <a:ea typeface="Amiri" pitchFamily="2" charset="-78"/>
                 <a:cs typeface="Amiri" pitchFamily="2" charset="-78"/>
               </a:rPr>
@@ -9587,7 +9587,7 @@
                 <a:solidFill>
                   <a:srgbClr val="FFFFFF"/>
                 </a:solidFill>
-                <a:latin typeface="Calibri" pitchFamily="34" charset="0"/>
+                <a:latin typeface="Amiri" pitchFamily="2" charset="-78"/>
                 <a:ea typeface="Amiri" pitchFamily="2" charset="-78"/>
                 <a:cs typeface="Amiri" pitchFamily="2" charset="-78"/>
               </a:rPr>
@@ -9653,7 +9653,7 @@
                 <a:solidFill>
                   <a:srgbClr val="FFFFFF"/>
                 </a:solidFill>
-                <a:latin typeface="Calibri" pitchFamily="34" charset="0"/>
+                <a:latin typeface="Amiri" pitchFamily="2" charset="-78"/>
                 <a:ea typeface="Amiri" pitchFamily="2" charset="-78"/>
                 <a:cs typeface="Amiri" pitchFamily="2" charset="-78"/>
               </a:rPr>
@@ -9719,7 +9719,7 @@
                 <a:solidFill>
                   <a:srgbClr val="FFFFFF"/>
                 </a:solidFill>
-                <a:latin typeface="Calibri" pitchFamily="34" charset="0"/>
+                <a:latin typeface="Amiri" pitchFamily="2" charset="-78"/>
                 <a:ea typeface="Amiri" pitchFamily="2" charset="-78"/>
                 <a:cs typeface="Amiri" pitchFamily="2" charset="-78"/>
               </a:rPr>
@@ -9785,7 +9785,7 @@
                 <a:solidFill>
                   <a:srgbClr val="FFFFFF"/>
                 </a:solidFill>
-                <a:latin typeface="Calibri" pitchFamily="34" charset="0"/>
+                <a:latin typeface="Amiri" pitchFamily="2" charset="-78"/>
                 <a:ea typeface="Amiri" pitchFamily="2" charset="-78"/>
                 <a:cs typeface="Amiri" pitchFamily="2" charset="-78"/>
               </a:rPr>
@@ -10572,7 +10572,7 @@
                 <a:solidFill>
                   <a:srgbClr val="FFFFFF"/>
                 </a:solidFill>
-                <a:latin typeface="Calibri" pitchFamily="34" charset="0"/>
+                <a:latin typeface="Amiri" pitchFamily="2" charset="-78"/>
                 <a:ea typeface="Amiri" pitchFamily="2" charset="-78"/>
                 <a:cs typeface="Amiri" pitchFamily="2" charset="-78"/>
               </a:rPr>
@@ -10638,7 +10638,7 @@
                 <a:solidFill>
                   <a:srgbClr val="FFFFFF"/>
                 </a:solidFill>
-                <a:latin typeface="Calibri" pitchFamily="34" charset="0"/>
+                <a:latin typeface="Amiri" pitchFamily="2" charset="-78"/>
                 <a:ea typeface="Amiri" pitchFamily="2" charset="-78"/>
                 <a:cs typeface="Amiri" pitchFamily="2" charset="-78"/>
               </a:rPr>
@@ -10704,7 +10704,7 @@
                 <a:solidFill>
                   <a:srgbClr val="FFFFFF"/>
                 </a:solidFill>
-                <a:latin typeface="Calibri" pitchFamily="34" charset="0"/>
+                <a:latin typeface="Amiri" pitchFamily="2" charset="-78"/>
                 <a:ea typeface="Amiri" pitchFamily="2" charset="-78"/>
                 <a:cs typeface="Amiri" pitchFamily="2" charset="-78"/>
               </a:rPr>
@@ -10770,7 +10770,7 @@
                 <a:solidFill>
                   <a:srgbClr val="FFFFFF"/>
                 </a:solidFill>
-                <a:latin typeface="Calibri" pitchFamily="34" charset="0"/>
+                <a:latin typeface="Amiri" pitchFamily="2" charset="-78"/>
                 <a:ea typeface="Amiri" pitchFamily="2" charset="-78"/>
                 <a:cs typeface="Amiri" pitchFamily="2" charset="-78"/>
               </a:rPr>
